--- a/src/replicards/images/replicards_social_media_preview.pptx
+++ b/src/replicards/images/replicards_social_media_preview.pptx
@@ -104,6 +104,11 @@
       </a:defRPr>
     </a:lvl9pPr>
   </p:defaultTextStyle>
+  <p:extLst>
+    <p:ext uri="{EFAFB233-063F-42B5-8137-9DF3F51BA10A}">
+      <p15:sldGuideLst xmlns:p15="http://schemas.microsoft.com/office/powerpoint/2012/main"/>
+    </p:ext>
+  </p:extLst>
 </p:presentation>
 </file>
 
@@ -254,7 +259,7 @@
           <a:p>
             <a:fld id="{A4AE5339-4698-48CC-B38A-C7E3B054E104}" type="datetimeFigureOut">
               <a:rPr lang="en-US" smtClean="0"/>
-              <a:t>2/24/2025</a:t>
+              <a:t>10/28/25</a:t>
             </a:fld>
             <a:endParaRPr lang="en-US"/>
           </a:p>
@@ -452,7 +457,7 @@
           <a:p>
             <a:fld id="{A4AE5339-4698-48CC-B38A-C7E3B054E104}" type="datetimeFigureOut">
               <a:rPr lang="en-US" smtClean="0"/>
-              <a:t>2/24/2025</a:t>
+              <a:t>10/28/25</a:t>
             </a:fld>
             <a:endParaRPr lang="en-US"/>
           </a:p>
@@ -660,7 +665,7 @@
           <a:p>
             <a:fld id="{A4AE5339-4698-48CC-B38A-C7E3B054E104}" type="datetimeFigureOut">
               <a:rPr lang="en-US" smtClean="0"/>
-              <a:t>2/24/2025</a:t>
+              <a:t>10/28/25</a:t>
             </a:fld>
             <a:endParaRPr lang="en-US"/>
           </a:p>
@@ -858,7 +863,7 @@
           <a:p>
             <a:fld id="{A4AE5339-4698-48CC-B38A-C7E3B054E104}" type="datetimeFigureOut">
               <a:rPr lang="en-US" smtClean="0"/>
-              <a:t>2/24/2025</a:t>
+              <a:t>10/28/25</a:t>
             </a:fld>
             <a:endParaRPr lang="en-US"/>
           </a:p>
@@ -1133,7 +1138,7 @@
           <a:p>
             <a:fld id="{A4AE5339-4698-48CC-B38A-C7E3B054E104}" type="datetimeFigureOut">
               <a:rPr lang="en-US" smtClean="0"/>
-              <a:t>2/24/2025</a:t>
+              <a:t>10/28/25</a:t>
             </a:fld>
             <a:endParaRPr lang="en-US"/>
           </a:p>
@@ -1398,7 +1403,7 @@
           <a:p>
             <a:fld id="{A4AE5339-4698-48CC-B38A-C7E3B054E104}" type="datetimeFigureOut">
               <a:rPr lang="en-US" smtClean="0"/>
-              <a:t>2/24/2025</a:t>
+              <a:t>10/28/25</a:t>
             </a:fld>
             <a:endParaRPr lang="en-US"/>
           </a:p>
@@ -1810,7 +1815,7 @@
           <a:p>
             <a:fld id="{A4AE5339-4698-48CC-B38A-C7E3B054E104}" type="datetimeFigureOut">
               <a:rPr lang="en-US" smtClean="0"/>
-              <a:t>2/24/2025</a:t>
+              <a:t>10/28/25</a:t>
             </a:fld>
             <a:endParaRPr lang="en-US"/>
           </a:p>
@@ -1951,7 +1956,7 @@
           <a:p>
             <a:fld id="{A4AE5339-4698-48CC-B38A-C7E3B054E104}" type="datetimeFigureOut">
               <a:rPr lang="en-US" smtClean="0"/>
-              <a:t>2/24/2025</a:t>
+              <a:t>10/28/25</a:t>
             </a:fld>
             <a:endParaRPr lang="en-US"/>
           </a:p>
@@ -2064,7 +2069,7 @@
           <a:p>
             <a:fld id="{A4AE5339-4698-48CC-B38A-C7E3B054E104}" type="datetimeFigureOut">
               <a:rPr lang="en-US" smtClean="0"/>
-              <a:t>2/24/2025</a:t>
+              <a:t>10/28/25</a:t>
             </a:fld>
             <a:endParaRPr lang="en-US"/>
           </a:p>
@@ -2375,7 +2380,7 @@
           <a:p>
             <a:fld id="{A4AE5339-4698-48CC-B38A-C7E3B054E104}" type="datetimeFigureOut">
               <a:rPr lang="en-US" smtClean="0"/>
-              <a:t>2/24/2025</a:t>
+              <a:t>10/28/25</a:t>
             </a:fld>
             <a:endParaRPr lang="en-US"/>
           </a:p>
@@ -2663,7 +2668,7 @@
           <a:p>
             <a:fld id="{A4AE5339-4698-48CC-B38A-C7E3B054E104}" type="datetimeFigureOut">
               <a:rPr lang="en-US" smtClean="0"/>
-              <a:t>2/24/2025</a:t>
+              <a:t>10/28/25</a:t>
             </a:fld>
             <a:endParaRPr lang="en-US"/>
           </a:p>
@@ -2904,7 +2909,7 @@
           <a:p>
             <a:fld id="{A4AE5339-4698-48CC-B38A-C7E3B054E104}" type="datetimeFigureOut">
               <a:rPr lang="en-US" smtClean="0"/>
-              <a:t>2/24/2025</a:t>
+              <a:t>10/28/25</a:t>
             </a:fld>
             <a:endParaRPr lang="en-US"/>
           </a:p>
@@ -3321,137 +3326,200 @@
           <a:chExt cx="0" cy="0"/>
         </a:xfrm>
       </p:grpSpPr>
-      <p:pic>
-        <p:nvPicPr>
-          <p:cNvPr id="3" name="Picture 2" descr="A black and white square with a square in the middle&#10;&#10;AI-generated content may be incorrect.">
-            <a:extLst>
-              <a:ext uri="{FF2B5EF4-FFF2-40B4-BE49-F238E27FC236}">
-                <a16:creationId xmlns:a16="http://schemas.microsoft.com/office/drawing/2014/main" id="{0A524B84-F04F-6C84-4823-BB05514260D8}"/>
-              </a:ext>
-            </a:extLst>
-          </p:cNvPr>
-          <p:cNvPicPr>
-            <a:picLocks noChangeAspect="1"/>
-          </p:cNvPicPr>
+      <p:grpSp>
+        <p:nvGrpSpPr>
+          <p:cNvPr id="4" name="Group 3">
+            <a:extLst>
+              <a:ext uri="{FF2B5EF4-FFF2-40B4-BE49-F238E27FC236}">
+                <a16:creationId xmlns:a16="http://schemas.microsoft.com/office/drawing/2014/main" id="{B31AC6F0-048C-0DD2-6950-02407B681015}"/>
+              </a:ext>
+            </a:extLst>
+          </p:cNvPr>
+          <p:cNvGrpSpPr/>
           <p:nvPr/>
-        </p:nvPicPr>
-        <p:blipFill>
-          <a:blip r:embed="rId2">
-            <a:extLst>
-              <a:ext uri="{28A0092B-C50C-407E-A947-70E740481C1C}">
-                <a14:useLocalDpi xmlns:a14="http://schemas.microsoft.com/office/drawing/2010/main" val="0"/>
-              </a:ext>
-            </a:extLst>
-          </a:blip>
-          <a:stretch>
-            <a:fillRect/>
-          </a:stretch>
-        </p:blipFill>
-        <p:spPr>
+        </p:nvGrpSpPr>
+        <p:grpSpPr>
           <a:xfrm>
-            <a:off x="1270533" y="1533546"/>
-            <a:ext cx="3771244" cy="3771244"/>
+            <a:off x="984738" y="1113692"/>
+            <a:ext cx="10691447" cy="4595446"/>
+            <a:chOff x="984738" y="1113692"/>
+            <a:chExt cx="10691447" cy="4595446"/>
           </a:xfrm>
-          <a:prstGeom prst="rect">
-            <a:avLst/>
-          </a:prstGeom>
-        </p:spPr>
-      </p:pic>
-      <p:sp>
-        <p:nvSpPr>
-          <p:cNvPr id="5" name="TextBox 4">
-            <a:extLst>
-              <a:ext uri="{FF2B5EF4-FFF2-40B4-BE49-F238E27FC236}">
-                <a16:creationId xmlns:a16="http://schemas.microsoft.com/office/drawing/2014/main" id="{BF19197E-9FCB-98A6-DDEE-DBA8378D6165}"/>
-              </a:ext>
-            </a:extLst>
-          </p:cNvPr>
-          <p:cNvSpPr txBox="1"/>
-          <p:nvPr/>
-        </p:nvSpPr>
-        <p:spPr>
-          <a:xfrm>
-            <a:off x="5515900" y="1681030"/>
-            <a:ext cx="5956175" cy="1200329"/>
-          </a:xfrm>
-          <a:prstGeom prst="rect">
-            <a:avLst/>
-          </a:prstGeom>
-          <a:noFill/>
-        </p:spPr>
-        <p:txBody>
-          <a:bodyPr wrap="square">
-            <a:spAutoFit/>
-          </a:bodyPr>
-          <a:lstStyle/>
-          <a:p>
-            <a:r>
-              <a:rPr lang="en-US" sz="7200" b="1" i="1" dirty="0">
-                <a:solidFill>
-                  <a:srgbClr val="343A40"/>
-                </a:solidFill>
-                <a:effectLst/>
-                <a:latin typeface="Source Sans Pro" panose="020B0503030403020204" pitchFamily="34" charset="0"/>
-              </a:rPr>
-              <a:t>The </a:t>
-            </a:r>
-            <a:r>
-              <a:rPr lang="en-US" sz="7200" b="1" i="1" dirty="0" err="1">
-                <a:solidFill>
-                  <a:srgbClr val="343A40"/>
-                </a:solidFill>
-                <a:effectLst/>
-                <a:latin typeface="Source Sans Pro" panose="020B0503030403020204" pitchFamily="34" charset="0"/>
-              </a:rPr>
-              <a:t>Replicards</a:t>
-            </a:r>
-            <a:endParaRPr lang="en-US" sz="7200" dirty="0"/>
-          </a:p>
-        </p:txBody>
-      </p:sp>
-      <p:sp>
-        <p:nvSpPr>
-          <p:cNvPr id="7" name="TextBox 6">
-            <a:extLst>
-              <a:ext uri="{FF2B5EF4-FFF2-40B4-BE49-F238E27FC236}">
-                <a16:creationId xmlns:a16="http://schemas.microsoft.com/office/drawing/2014/main" id="{CA23FF1A-78C7-7B6D-25FF-BEFD34CC520F}"/>
-              </a:ext>
-            </a:extLst>
-          </p:cNvPr>
-          <p:cNvSpPr txBox="1"/>
-          <p:nvPr/>
-        </p:nvSpPr>
-        <p:spPr>
-          <a:xfrm>
-            <a:off x="5515899" y="3246500"/>
-            <a:ext cx="5879687" cy="1754326"/>
-          </a:xfrm>
-          <a:prstGeom prst="rect">
-            <a:avLst/>
-          </a:prstGeom>
-          <a:noFill/>
-        </p:spPr>
-        <p:txBody>
-          <a:bodyPr wrap="square">
-            <a:spAutoFit/>
-          </a:bodyPr>
-          <a:lstStyle/>
-          <a:p>
-            <a:r>
-              <a:rPr lang="en-US" sz="5400" i="0" dirty="0">
-                <a:effectLst/>
+        </p:grpSpPr>
+        <p:sp>
+          <p:nvSpPr>
+            <p:cNvPr id="2" name="Rectangle 1">
+              <a:extLst>
+                <a:ext uri="{FF2B5EF4-FFF2-40B4-BE49-F238E27FC236}">
+                  <a16:creationId xmlns:a16="http://schemas.microsoft.com/office/drawing/2014/main" id="{3F9B1E6C-8103-73EC-77A4-E77DD4055304}"/>
+                </a:ext>
+              </a:extLst>
+            </p:cNvPr>
+            <p:cNvSpPr/>
+            <p:nvPr/>
+          </p:nvSpPr>
+          <p:spPr>
+            <a:xfrm>
+              <a:off x="984738" y="1113692"/>
+              <a:ext cx="10691447" cy="4595446"/>
+            </a:xfrm>
+            <a:prstGeom prst="rect">
+              <a:avLst/>
+            </a:prstGeom>
+            <a:solidFill>
+              <a:schemeClr val="bg1"/>
+            </a:solidFill>
+            <a:ln>
+              <a:noFill/>
+            </a:ln>
+          </p:spPr>
+          <p:style>
+            <a:lnRef idx="2">
+              <a:schemeClr val="accent1">
+                <a:shade val="15000"/>
+              </a:schemeClr>
+            </a:lnRef>
+            <a:fillRef idx="1">
+              <a:schemeClr val="accent1"/>
+            </a:fillRef>
+            <a:effectRef idx="0">
+              <a:schemeClr val="accent1"/>
+            </a:effectRef>
+            <a:fontRef idx="minor">
+              <a:schemeClr val="lt1"/>
+            </a:fontRef>
+          </p:style>
+          <p:txBody>
+            <a:bodyPr rtlCol="0" anchor="ctr"/>
+            <a:lstStyle/>
+            <a:p>
+              <a:pPr algn="ctr"/>
+              <a:endParaRPr lang="en-US"/>
+            </a:p>
+          </p:txBody>
+        </p:sp>
+        <p:pic>
+          <p:nvPicPr>
+            <p:cNvPr id="3" name="Picture 2" descr="A black and white square with a square in the middle&#10;&#10;AI-generated content may be incorrect.">
+              <a:extLst>
+                <a:ext uri="{FF2B5EF4-FFF2-40B4-BE49-F238E27FC236}">
+                  <a16:creationId xmlns:a16="http://schemas.microsoft.com/office/drawing/2014/main" id="{0A524B84-F04F-6C84-4823-BB05514260D8}"/>
+                </a:ext>
+              </a:extLst>
+            </p:cNvPr>
+            <p:cNvPicPr>
+              <a:picLocks noChangeAspect="1"/>
+            </p:cNvPicPr>
+            <p:nvPr/>
+          </p:nvPicPr>
+          <p:blipFill>
+            <a:blip r:embed="rId2">
+              <a:extLst>
+                <a:ext uri="{28A0092B-C50C-407E-A947-70E740481C1C}">
+                  <a14:useLocalDpi xmlns:a14="http://schemas.microsoft.com/office/drawing/2010/main" val="0"/>
+                </a:ext>
+              </a:extLst>
+            </a:blip>
+            <a:stretch>
+              <a:fillRect/>
+            </a:stretch>
+          </p:blipFill>
+          <p:spPr>
+            <a:xfrm>
+              <a:off x="1270533" y="1533546"/>
+              <a:ext cx="3771244" cy="3771244"/>
+            </a:xfrm>
+            <a:prstGeom prst="rect">
+              <a:avLst/>
+            </a:prstGeom>
+          </p:spPr>
+        </p:pic>
+        <p:sp>
+          <p:nvSpPr>
+            <p:cNvPr id="5" name="TextBox 4">
+              <a:extLst>
+                <a:ext uri="{FF2B5EF4-FFF2-40B4-BE49-F238E27FC236}">
+                  <a16:creationId xmlns:a16="http://schemas.microsoft.com/office/drawing/2014/main" id="{BF19197E-9FCB-98A6-DDEE-DBA8378D6165}"/>
+                </a:ext>
+              </a:extLst>
+            </p:cNvPr>
+            <p:cNvSpPr txBox="1"/>
+            <p:nvPr/>
+          </p:nvSpPr>
+          <p:spPr>
+            <a:xfrm>
+              <a:off x="5515900" y="1681030"/>
+              <a:ext cx="5956175" cy="1200329"/>
+            </a:xfrm>
+            <a:prstGeom prst="rect">
+              <a:avLst/>
+            </a:prstGeom>
+            <a:noFill/>
+          </p:spPr>
+          <p:txBody>
+            <a:bodyPr wrap="square">
+              <a:spAutoFit/>
+            </a:bodyPr>
+            <a:lstStyle/>
+            <a:p>
+              <a:r>
+                <a:rPr lang="en-US" sz="7200" b="1" i="1" dirty="0">
+                  <a:solidFill>
+                    <a:srgbClr val="343A40"/>
+                  </a:solidFill>
+                  <a:effectLst/>
+                  <a:latin typeface="Source Sans Pro" panose="020B0503030403020204" pitchFamily="34" charset="0"/>
+                </a:rPr>
+                <a:t>The Replicards</a:t>
+              </a:r>
+              <a:endParaRPr lang="en-US" sz="7200" dirty="0"/>
+            </a:p>
+          </p:txBody>
+        </p:sp>
+        <p:sp>
+          <p:nvSpPr>
+            <p:cNvPr id="7" name="TextBox 6">
+              <a:extLst>
+                <a:ext uri="{FF2B5EF4-FFF2-40B4-BE49-F238E27FC236}">
+                  <a16:creationId xmlns:a16="http://schemas.microsoft.com/office/drawing/2014/main" id="{CA23FF1A-78C7-7B6D-25FF-BEFD34CC520F}"/>
+                </a:ext>
+              </a:extLst>
+            </p:cNvPr>
+            <p:cNvSpPr txBox="1"/>
+            <p:nvPr/>
+          </p:nvSpPr>
+          <p:spPr>
+            <a:xfrm>
+              <a:off x="5515899" y="3246500"/>
+              <a:ext cx="5879687" cy="1754326"/>
+            </a:xfrm>
+            <a:prstGeom prst="rect">
+              <a:avLst/>
+            </a:prstGeom>
+            <a:noFill/>
+          </p:spPr>
+          <p:txBody>
+            <a:bodyPr wrap="square">
+              <a:spAutoFit/>
+            </a:bodyPr>
+            <a:lstStyle/>
+            <a:p>
+              <a:r>
+                <a:rPr lang="en-US" sz="5400" i="0" dirty="0">
+                  <a:effectLst/>
+                  <a:latin typeface="Source Sans Pro" panose="020B0503030403020204" pitchFamily="34" charset="0"/>
+                  <a:ea typeface="Source Sans Pro" panose="020B0503030403020204" pitchFamily="34" charset="0"/>
+                </a:rPr>
+                <a:t>Teaching evolution with a card game.</a:t>
+              </a:r>
+              <a:endParaRPr lang="en-US" sz="5400" dirty="0">
                 <a:latin typeface="Source Sans Pro" panose="020B0503030403020204" pitchFamily="34" charset="0"/>
                 <a:ea typeface="Source Sans Pro" panose="020B0503030403020204" pitchFamily="34" charset="0"/>
-              </a:rPr>
-              <a:t>Teaching evolution with a card game.</a:t>
-            </a:r>
-            <a:endParaRPr lang="en-US" sz="5400" dirty="0">
-              <a:latin typeface="Source Sans Pro" panose="020B0503030403020204" pitchFamily="34" charset="0"/>
-              <a:ea typeface="Source Sans Pro" panose="020B0503030403020204" pitchFamily="34" charset="0"/>
-            </a:endParaRPr>
-          </a:p>
-        </p:txBody>
-      </p:sp>
+              </a:endParaRPr>
+            </a:p>
+          </p:txBody>
+        </p:sp>
+      </p:grpSp>
     </p:spTree>
     <p:extLst>
       <p:ext uri="{BB962C8B-B14F-4D97-AF65-F5344CB8AC3E}">
